--- a/TV_AI_AGENT/backend/output/roboai_academy_application/powerpoint/slide_1.pptx
+++ b/TV_AI_AGENT/backend/output/roboai_academy_application/powerpoint/slide_1.pptx
@@ -3177,6 +3177,15 @@
                 </a:lnSpc>
               </a:pPr>
               <a:r>
+                <a:rPr lang="en-US" sz="7038" dirty="0">
+                  <a:solidFill>
+                    <a:srgbClr val="FF0000"/>
+                  </a:solidFill>
+                  <a:latin typeface="Gilda Display"/>
+                  <a:ea typeface="Gilda Display"/>
+                  <a:cs typeface="Gilda Display"/>
+                  <a:sym typeface="Gilda Display"/>
+                </a:rPr>
                 <a:t>Apply to study at the RoboAI Academy!</a:t>
               </a:r>
             </a:p>
@@ -3209,7 +3218,16 @@
                 </a:lnSpc>
               </a:pPr>
               <a:r>
-                <a:t>Learning happens through hands-on projects rather than traditional lectures with workable solutions meeting customer needs. Selections are made based on application and interviews in May. The academy fosters international collaboration with English as a primary language.</a:t>
+                <a:rPr lang="en-US" sz="5000" dirty="0">
+                  <a:solidFill>
+                    <a:schemeClr val="bg2"/>
+                  </a:solidFill>
+                  <a:latin typeface="HK Grotesk Light"/>
+                  <a:ea typeface="HK Grotesk Light"/>
+                  <a:cs typeface="HK Grotesk Light"/>
+                  <a:sym typeface="HK Grotesk Light"/>
+                </a:rPr>
+                <a:t>Application period: March 24 to April 12, 2026</a:t>
               </a:r>
             </a:p>
           </p:txBody>
@@ -3241,7 +3259,16 @@
                 </a:lnSpc>
               </a:pPr>
               <a:r>
-                <a:t>Hands-on learning through projects for engineering students</a:t>
+                <a:rPr lang="en-US" sz="2192" dirty="0">
+                  <a:solidFill>
+                    <a:srgbClr val="D9E9FC"/>
+                  </a:solidFill>
+                  <a:latin typeface="HK Grotesk Light"/>
+                  <a:ea typeface="HK Grotesk Light"/>
+                  <a:cs typeface="HK Grotesk Light"/>
+                  <a:sym typeface="HK Grotesk Light"/>
+                </a:rPr>
+                <a:t>Hands-on learning through projects</a:t>
               </a:r>
             </a:p>
           </p:txBody>
